--- a/decks/triple-space/triple-space_ch2_star-life.pptx
+++ b/decks/triple-space/triple-space_ch2_star-life.pptx
@@ -125,30 +125,30 @@
   <p:extLst>
     <p:ext uri="{521415D9-36F7-43E2-AB2F-B90AF26B5E84}">
       <p14:sectionLst xmlns:p14="http://schemas.microsoft.com/office/powerpoint/2010/main">
-        <p14:section name="Opening" id="{bf614603-5353-a59a-d2b1-ae7d1b79eef5}">
+        <p14:section name="Opening" id="{930a8e6a-edcc-e9c6-d809-82f1e9132173}">
           <p14:sldIdLst>
             <p14:sldId id="256"/>
           </p14:sldIdLst>
         </p14:section>
-        <p14:section name="Gate" id="{48de1a2e-2ab1-2982-1ab5-567e3e9f8721}">
+        <p14:section name="Gate" id="{4bcc8b86-2d21-9173-6356-b533e95f4ce6}">
           <p14:sldIdLst>
             <p14:sldId id="257"/>
             <p14:sldId id="258"/>
           </p14:sldIdLst>
         </p14:section>
-        <p14:section name="Pre-teach" id="{3b2803a9-9dd3-942b-0efd-fb7431d8a593}">
+        <p14:section name="Pre-teach" id="{c494d131-82e4-8a54-3a19-b50b59b02d06}">
           <p14:sldIdLst>
             <p14:sldId id="259"/>
             <p14:sldId id="260"/>
           </p14:sldIdLst>
         </p14:section>
-        <p14:section name="Read-along" id="{1842dcc3-98f0-6945-7b3d-ae723b13de11}">
+        <p14:section name="Read-along" id="{ee4f534f-a45b-cab4-eb9e-78fb9b0ae22e}">
           <p14:sldIdLst>
             <p14:sldId id="261"/>
             <p14:sldId id="262"/>
           </p14:sldIdLst>
         </p14:section>
-        <p14:section name="Teach" id="{5e3f10a6-38da-ba7b-e8c5-de87ed4bd8ec}">
+        <p14:section name="Teach" id="{e10dfac7-09d9-911a-d38e-f4e50dc2977d}">
           <p14:sldIdLst>
             <p14:sldId id="263"/>
             <p14:sldId id="264"/>
@@ -156,7 +156,7 @@
             <p14:sldId id="266"/>
           </p14:sldIdLst>
         </p14:section>
-        <p14:section name="Routes" id="{69aef633-da3d-ce87-9bb3-af5a136b5dae}">
+        <p14:section name="Routes" id="{98528f0f-f273-9c13-b9ed-41892c9a4e1a}">
           <p14:sldIdLst>
             <p14:sldId id="267"/>
             <p14:sldId id="268"/>
@@ -164,12 +164,12 @@
             <p14:sldId id="270"/>
           </p14:sldIdLst>
         </p14:section>
-        <p14:section name="Close" id="{fa22a281-43c4-242c-7687-12e5ce1eda56}">
+        <p14:section name="Close" id="{4b9512d7-7661-2c03-2c71-9823321870dd}">
           <p14:sldIdLst>
             <p14:sldId id="271"/>
           </p14:sldIdLst>
         </p14:section>
-        <p14:section name="Answers" id="{03855ae2-5b68-06ed-00b4-7b60f01755f1}">
+        <p14:section name="Answers" id="{f5b6b4a7-3843-2a83-2520-e156b4ad0880}">
           <p14:sldIdLst>
             <p14:sldId id="272"/>
             <p14:sldId id="273"/>
@@ -1232,7 +1232,7 @@
               <a:rPr lang="en-US" dirty="0"/>
               <a:t>Exit ticket — individual, silent, on a slip or mini-whiteboard. Recall before help: no notes, no lanes, no hints. Collect before pupils leave.
 Question: Why are elements heavier than iron made in a supernova and not in a main sequence star?
-Answer: A   Only a supernova releases enough energy to make nuclei heavier than iron. Fusion in stars produces elements up to iron. Elements heavier than iron are produced in a supernova, and the explosion spreads them through the universe.
+Answer: B   Only a supernova releases enough energy to make nuclei heavier than iron. Fusion in stars produces elements up to iron. Elements heavier than iron are produced in a supernova, and the explosion spreads them through the universe.
 Source of this question: module 3 task ("Where the elements come from") from the manifest.
 Sort the slips: correct → ready to move on; incorrect → start next lesson in the pre-teach group, with the read-along and the Support lane. Same destination next time.</a:t>
             </a:r>
@@ -1505,7 +1505,7 @@
             <a:r>
               <a:rPr lang="en-US" dirty="0"/>
               <a:t>Answers — exit ticket: Exit ticket. Reveal the answer; pupils mark their own work in a different colour, then read the "why" together. Same destination for every lane, so one answer serves the whole class.
-Answer: A   Only a supernova releases enough energy to make nuclei heavier than iron
+Answer: B   Only a supernova releases enough energy to make nuclei heavier than iron
 Why: Fusion in stars produces elements up to iron. Elements heavier than iron are produced in a supernova, and the explosion spreads them through the universe.
 Ask a Support pupil to explain one step, and a Stretch pupil to share their extension.</a:t>
             </a:r>
@@ -1596,8 +1596,8 @@
             <a:r>
               <a:rPr lang="en-US" dirty="0"/>
               <a:t>Do now — retrieval. Silent, no notes, no help: recall comes before any support. Give about four minutes.
-1. In a main sequence star, what does nuclear fusion turn hydrogen into?  →  A   Helium
-2. What decides which life cycle a star follows?  →  A   Its mass
+1. In a main sequence star, what does nuclear fusion turn hydrogen into?  →  B   Helium
+2. What decides which life cycle a star follows?  →  D   Its mass
 3. Elements heavier than ___ are made in a supernova.  →  iron
 Circulate: who gets 3/3 (Stretch route), 2/3 (Core), 0–1 (Support)? Use this to route pupils later in the lesson.</a:t>
             </a:r>
@@ -1688,8 +1688,8 @@
             <a:r>
               <a:rPr lang="en-US" dirty="0"/>
               <a:t>Answers — pupils mark their own in a different colour, then hands up for 3/3, 2/3, 1/3.
-1. A   Helium. Main sequence stars fuse hydrogen nuclei into helium nuclei. Heavier elements come later in a star's life.
-2. A   Its mass. The life cycle is determined by the size (mass) of the star.
+1. B   Helium. Main sequence stars fuse hydrogen nuclei into helium nuclei. Heavier elements come later in a star's life.
+2. D   Its mass. The life cycle is determined by the size (mass) of the star.
 3. iron. Fusion in the most massive stars goes up to iron. Heavier elements need the energy of a supernova.
 Say the route each score points to: 3/3 Stretch, 2/3 Core, 0–1 Support. Pupils may choose to move up.</a:t>
             </a:r>
@@ -8611,7 +8611,7 @@
                 <a:ea typeface="Calibri" pitchFamily="34" charset="-122"/>
                 <a:cs typeface="Calibri" pitchFamily="34" charset="-120"/>
               </a:rPr>
-              <a:t>Only a supernova releases enough energy to make nuclei heavier than iron</a:t>
+              <a:t>There is no iron inside stars</a:t>
             </a:r>
             <a:endParaRPr lang="en-US" sz="2400" dirty="0"/>
           </a:p>
@@ -8648,7 +8648,7 @@
                 <a:ea typeface="Calibri" pitchFamily="34" charset="-122"/>
                 <a:cs typeface="Calibri" pitchFamily="34" charset="-120"/>
               </a:rPr>
-              <a:t>There is no iron inside stars</a:t>
+              <a:t>Only a supernova releases enough energy to make nuclei heavier than iron</a:t>
             </a:r>
             <a:endParaRPr lang="en-US" sz="2400" dirty="0"/>
           </a:p>
@@ -10415,7 +10415,7 @@
                 <a:ea typeface="Cambria" pitchFamily="34" charset="-122"/>
                 <a:cs typeface="Cambria" pitchFamily="34" charset="-120"/>
               </a:rPr>
-              <a:t>A   Only a supernova releases enough energy to make nuclei heavier than iron</a:t>
+              <a:t>B   Only a supernova releases enough energy to make nuclei heavier than iron</a:t>
             </a:r>
             <a:endParaRPr lang="en-US" sz="1800" dirty="0"/>
           </a:p>
@@ -10919,7 +10919,7 @@
           <a:p>
             <a:pPr algn="l" indent="0" marL="0">
               <a:spcAft>
-                <a:spcPts val="600"/>
+                <a:spcPts val="200"/>
               </a:spcAft>
               <a:buNone/>
             </a:pPr>
@@ -10936,7 +10936,7 @@
             </a:r>
             <a:pPr algn="l" indent="0" marL="0">
               <a:spcAft>
-                <a:spcPts val="600"/>
+                <a:spcPts val="200"/>
               </a:spcAft>
               <a:buNone/>
             </a:pPr>
@@ -10949,6 +10949,43 @@
                 <a:ea typeface="Calibri" pitchFamily="34" charset="-122"/>
                 <a:cs typeface="Calibri" pitchFamily="34" charset="-120"/>
               </a:rPr>
+              <a:t>Carbon</a:t>
+            </a:r>
+            <a:endParaRPr lang="en-US" sz="2400" dirty="0"/>
+          </a:p>
+          <a:p>
+            <a:pPr algn="l" indent="0" marL="0">
+              <a:spcAft>
+                <a:spcPts val="200"/>
+              </a:spcAft>
+              <a:buNone/>
+            </a:pPr>
+            <a:r>
+              <a:rPr lang="en-US" sz="2400" b="1" dirty="0">
+                <a:solidFill>
+                  <a:srgbClr val="B8862B"/>
+                </a:solidFill>
+                <a:latin typeface="Calibri" pitchFamily="34" charset="0"/>
+                <a:ea typeface="Calibri" pitchFamily="34" charset="-122"/>
+                <a:cs typeface="Calibri" pitchFamily="34" charset="-120"/>
+              </a:rPr>
+              <a:t>B   </a:t>
+            </a:r>
+            <a:pPr algn="l" indent="0" marL="0">
+              <a:spcAft>
+                <a:spcPts val="200"/>
+              </a:spcAft>
+              <a:buNone/>
+            </a:pPr>
+            <a:r>
+              <a:rPr lang="en-US" sz="2400" dirty="0">
+                <a:solidFill>
+                  <a:srgbClr val="1E2229"/>
+                </a:solidFill>
+                <a:latin typeface="Calibri" pitchFamily="34" charset="0"/>
+                <a:ea typeface="Calibri" pitchFamily="34" charset="-122"/>
+                <a:cs typeface="Calibri" pitchFamily="34" charset="-120"/>
+              </a:rPr>
               <a:t>Helium</a:t>
             </a:r>
             <a:endParaRPr lang="en-US" sz="2400" dirty="0"/>
@@ -10956,7 +10993,7 @@
           <a:p>
             <a:pPr algn="l" indent="0" marL="0">
               <a:spcAft>
-                <a:spcPts val="600"/>
+                <a:spcPts val="200"/>
               </a:spcAft>
               <a:buNone/>
             </a:pPr>
@@ -10969,11 +11006,11 @@
                 <a:ea typeface="Calibri" pitchFamily="34" charset="-122"/>
                 <a:cs typeface="Calibri" pitchFamily="34" charset="-120"/>
               </a:rPr>
-              <a:t>B   </a:t>
+              <a:t>C   </a:t>
             </a:r>
             <a:pPr algn="l" indent="0" marL="0">
               <a:spcAft>
-                <a:spcPts val="600"/>
+                <a:spcPts val="200"/>
               </a:spcAft>
               <a:buNone/>
             </a:pPr>
@@ -10986,81 +11023,44 @@
                 <a:ea typeface="Calibri" pitchFamily="34" charset="-122"/>
                 <a:cs typeface="Calibri" pitchFamily="34" charset="-120"/>
               </a:rPr>
+              <a:t>Oxygen</a:t>
+            </a:r>
+            <a:endParaRPr lang="en-US" sz="2400" dirty="0"/>
+          </a:p>
+          <a:p>
+            <a:pPr algn="l" indent="0" marL="0">
+              <a:spcAft>
+                <a:spcPts val="200"/>
+              </a:spcAft>
+              <a:buNone/>
+            </a:pPr>
+            <a:r>
+              <a:rPr lang="en-US" sz="2400" b="1" dirty="0">
+                <a:solidFill>
+                  <a:srgbClr val="B8862B"/>
+                </a:solidFill>
+                <a:latin typeface="Calibri" pitchFamily="34" charset="0"/>
+                <a:ea typeface="Calibri" pitchFamily="34" charset="-122"/>
+                <a:cs typeface="Calibri" pitchFamily="34" charset="-120"/>
+              </a:rPr>
+              <a:t>D   </a:t>
+            </a:r>
+            <a:pPr algn="l" indent="0" marL="0">
+              <a:spcAft>
+                <a:spcPts val="200"/>
+              </a:spcAft>
+              <a:buNone/>
+            </a:pPr>
+            <a:r>
+              <a:rPr lang="en-US" sz="2400" dirty="0">
+                <a:solidFill>
+                  <a:srgbClr val="1E2229"/>
+                </a:solidFill>
+                <a:latin typeface="Calibri" pitchFamily="34" charset="0"/>
+                <a:ea typeface="Calibri" pitchFamily="34" charset="-122"/>
+                <a:cs typeface="Calibri" pitchFamily="34" charset="-120"/>
+              </a:rPr>
               <a:t>Iron</a:t>
-            </a:r>
-            <a:endParaRPr lang="en-US" sz="2400" dirty="0"/>
-          </a:p>
-          <a:p>
-            <a:pPr algn="l" indent="0" marL="0">
-              <a:spcAft>
-                <a:spcPts val="600"/>
-              </a:spcAft>
-              <a:buNone/>
-            </a:pPr>
-            <a:r>
-              <a:rPr lang="en-US" sz="2400" b="1" dirty="0">
-                <a:solidFill>
-                  <a:srgbClr val="B8862B"/>
-                </a:solidFill>
-                <a:latin typeface="Calibri" pitchFamily="34" charset="0"/>
-                <a:ea typeface="Calibri" pitchFamily="34" charset="-122"/>
-                <a:cs typeface="Calibri" pitchFamily="34" charset="-120"/>
-              </a:rPr>
-              <a:t>C   </a:t>
-            </a:r>
-            <a:pPr algn="l" indent="0" marL="0">
-              <a:spcAft>
-                <a:spcPts val="600"/>
-              </a:spcAft>
-              <a:buNone/>
-            </a:pPr>
-            <a:r>
-              <a:rPr lang="en-US" sz="2400" dirty="0">
-                <a:solidFill>
-                  <a:srgbClr val="1E2229"/>
-                </a:solidFill>
-                <a:latin typeface="Calibri" pitchFamily="34" charset="0"/>
-                <a:ea typeface="Calibri" pitchFamily="34" charset="-122"/>
-                <a:cs typeface="Calibri" pitchFamily="34" charset="-120"/>
-              </a:rPr>
-              <a:t>Carbon</a:t>
-            </a:r>
-            <a:endParaRPr lang="en-US" sz="2400" dirty="0"/>
-          </a:p>
-          <a:p>
-            <a:pPr algn="l" indent="0" marL="0">
-              <a:spcAft>
-                <a:spcPts val="600"/>
-              </a:spcAft>
-              <a:buNone/>
-            </a:pPr>
-            <a:r>
-              <a:rPr lang="en-US" sz="2400" b="1" dirty="0">
-                <a:solidFill>
-                  <a:srgbClr val="B8862B"/>
-                </a:solidFill>
-                <a:latin typeface="Calibri" pitchFamily="34" charset="0"/>
-                <a:ea typeface="Calibri" pitchFamily="34" charset="-122"/>
-                <a:cs typeface="Calibri" pitchFamily="34" charset="-120"/>
-              </a:rPr>
-              <a:t>D   </a:t>
-            </a:r>
-            <a:pPr algn="l" indent="0" marL="0">
-              <a:spcAft>
-                <a:spcPts val="600"/>
-              </a:spcAft>
-              <a:buNone/>
-            </a:pPr>
-            <a:r>
-              <a:rPr lang="en-US" sz="2400" dirty="0">
-                <a:solidFill>
-                  <a:srgbClr val="1E2229"/>
-                </a:solidFill>
-                <a:latin typeface="Calibri" pitchFamily="34" charset="0"/>
-                <a:ea typeface="Calibri" pitchFamily="34" charset="-122"/>
-                <a:cs typeface="Calibri" pitchFamily="34" charset="-120"/>
-              </a:rPr>
-              <a:t>Oxygen</a:t>
             </a:r>
             <a:endParaRPr lang="en-US" sz="2400" dirty="0"/>
           </a:p>
@@ -11264,7 +11264,7 @@
                 <a:ea typeface="Calibri" pitchFamily="34" charset="-122"/>
                 <a:cs typeface="Calibri" pitchFamily="34" charset="-120"/>
               </a:rPr>
-              <a:t>Its mass</a:t>
+              <a:t>Its distance from Earth</a:t>
             </a:r>
             <a:endParaRPr lang="en-US" sz="2200" dirty="0"/>
           </a:p>
@@ -11338,7 +11338,7 @@
                 <a:ea typeface="Calibri" pitchFamily="34" charset="-122"/>
                 <a:cs typeface="Calibri" pitchFamily="34" charset="-120"/>
               </a:rPr>
-              <a:t>Its distance from Earth</a:t>
+              <a:t>How many planets orbit it</a:t>
             </a:r>
             <a:endParaRPr lang="en-US" sz="2200" dirty="0"/>
           </a:p>
@@ -11375,7 +11375,7 @@
                 <a:ea typeface="Calibri" pitchFamily="34" charset="-122"/>
                 <a:cs typeface="Calibri" pitchFamily="34" charset="-120"/>
               </a:rPr>
-              <a:t>How many planets orbit it</a:t>
+              <a:t>Its mass</a:t>
             </a:r>
             <a:endParaRPr lang="en-US" sz="2200" dirty="0"/>
           </a:p>
@@ -11974,7 +11974,7 @@
                 <a:ea typeface="Calibri" pitchFamily="34" charset="-122"/>
                 <a:cs typeface="Calibri" pitchFamily="34" charset="-120"/>
               </a:rPr>
-              <a:t>A   Helium</a:t>
+              <a:t>B   Helium</a:t>
             </a:r>
             <a:endParaRPr lang="en-US" sz="2200" dirty="0"/>
           </a:p>
@@ -12224,7 +12224,7 @@
                 <a:ea typeface="Calibri" pitchFamily="34" charset="-122"/>
                 <a:cs typeface="Calibri" pitchFamily="34" charset="-120"/>
               </a:rPr>
-              <a:t>A   Its mass</a:t>
+              <a:t>D   Its mass</a:t>
             </a:r>
             <a:endParaRPr lang="en-US" sz="2200" dirty="0"/>
           </a:p>

--- a/decks/triple-space/triple-space_ch2_star-life.pptx
+++ b/decks/triple-space/triple-space_ch2_star-life.pptx
@@ -125,30 +125,30 @@
   <p:extLst>
     <p:ext uri="{521415D9-36F7-43E2-AB2F-B90AF26B5E84}">
       <p14:sectionLst xmlns:p14="http://schemas.microsoft.com/office/powerpoint/2010/main">
-        <p14:section name="Opening" id="{930a8e6a-edcc-e9c6-d809-82f1e9132173}">
+        <p14:section name="Opening" id="{82a9542d-e34f-b0e7-8498-177b4317c841}">
           <p14:sldIdLst>
             <p14:sldId id="256"/>
           </p14:sldIdLst>
         </p14:section>
-        <p14:section name="Gate" id="{4bcc8b86-2d21-9173-6356-b533e95f4ce6}">
+        <p14:section name="Gate" id="{7e3bfffd-3a01-ed1e-6bbe-341826a83bcb}">
           <p14:sldIdLst>
             <p14:sldId id="257"/>
             <p14:sldId id="258"/>
           </p14:sldIdLst>
         </p14:section>
-        <p14:section name="Pre-teach" id="{c494d131-82e4-8a54-3a19-b50b59b02d06}">
+        <p14:section name="Pre-teach" id="{98b53c3d-5426-00a8-1941-e8c4f9444b7f}">
           <p14:sldIdLst>
             <p14:sldId id="259"/>
             <p14:sldId id="260"/>
           </p14:sldIdLst>
         </p14:section>
-        <p14:section name="Read-along" id="{ee4f534f-a45b-cab4-eb9e-78fb9b0ae22e}">
+        <p14:section name="Read-along" id="{46f670fd-d8a0-919a-3591-2c3ec3a5834d}">
           <p14:sldIdLst>
             <p14:sldId id="261"/>
             <p14:sldId id="262"/>
           </p14:sldIdLst>
         </p14:section>
-        <p14:section name="Teach" id="{e10dfac7-09d9-911a-d38e-f4e50dc2977d}">
+        <p14:section name="Teach" id="{5a0f60db-2392-6e17-9ad7-3a40b0b3ef57}">
           <p14:sldIdLst>
             <p14:sldId id="263"/>
             <p14:sldId id="264"/>
@@ -156,7 +156,7 @@
             <p14:sldId id="266"/>
           </p14:sldIdLst>
         </p14:section>
-        <p14:section name="Routes" id="{98528f0f-f273-9c13-b9ed-41892c9a4e1a}">
+        <p14:section name="Routes" id="{27d9a05b-bc8a-67e0-bda6-062a3321ea32}">
           <p14:sldIdLst>
             <p14:sldId id="267"/>
             <p14:sldId id="268"/>
@@ -164,12 +164,12 @@
             <p14:sldId id="270"/>
           </p14:sldIdLst>
         </p14:section>
-        <p14:section name="Close" id="{4b9512d7-7661-2c03-2c71-9823321870dd}">
+        <p14:section name="Close" id="{67135d96-6b5b-083a-2e20-0bdc68297aec}">
           <p14:sldIdLst>
             <p14:sldId id="271"/>
           </p14:sldIdLst>
         </p14:section>
-        <p14:section name="Answers" id="{f5b6b4a7-3843-2a83-2520-e156b4ad0880}">
+        <p14:section name="Answers" id="{2e1c3e3e-412a-15e7-6e27-414c6ce5dddf}">
           <p14:sldIdLst>
             <p14:sldId id="272"/>
             <p14:sldId id="273"/>
